--- a/assets/结构图/论点证据结论-001/example.pptx
+++ b/assets/结构图/论点证据结论-001/example.pptx
@@ -2,13 +2,13 @@
 <file path=ppt/presentation.xml><?xml version="1.0" encoding="utf-8"?>
 <p:presentation xmlns:p="http://schemas.openxmlformats.org/presentationml/2006/main">
   <p:sldMasterIdLst>
-    <p:sldMasterId xmlns:r="http://schemas.openxmlformats.org/officeDocument/2006/relationships" id="2147483648" r:id="R15db14a11c2c4212"/>
+    <p:sldMasterId xmlns:r="http://schemas.openxmlformats.org/officeDocument/2006/relationships" id="2147483648" r:id="Rf99422e12f794a8c"/>
   </p:sldMasterIdLst>
   <p:notesMasterIdLst>
-    <p:notesMasterId xmlns:r="http://schemas.openxmlformats.org/officeDocument/2006/relationships" r:id="Rbb36c6a9a8da44f4"/>
+    <p:notesMasterId xmlns:r="http://schemas.openxmlformats.org/officeDocument/2006/relationships" r:id="Rfa22ba7cd549455f"/>
   </p:notesMasterIdLst>
   <p:sldIdLst>
-    <p:sldId xmlns:r="http://schemas.openxmlformats.org/officeDocument/2006/relationships" id="256" r:id="Ra96ef68d3e754fe3"/>
+    <p:sldId xmlns:r="http://schemas.openxmlformats.org/officeDocument/2006/relationships" id="256" r:id="R7970956974224fe3"/>
   </p:sldIdLst>
   <p:sldSz cx="12192000" cy="6858000"/>
   <p:notesSz cx="6858000" cy="9144000"/>
@@ -360,36 +360,108 @@
         </a:effectStyle>
         <a:effectStyle>
           <a:effectLst>
+            <a:outerShdw blurRad="266700" dist="114300" dir="5400000">
+              <a:srgbClr val="2F5EA8">
+                <a:alpha val="22000"/>
+              </a:srgbClr>
+            </a:outerShdw>
+          </a:effectLst>
+        </a:effectStyle>
+        <a:effectStyle>
+          <a:effectLst>
+            <a:outerShdw blurRad="152400" dist="66675" dir="5400000">
+              <a:srgbClr val="2F5EA8">
+                <a:alpha val="9000"/>
+              </a:srgbClr>
+            </a:outerShdw>
+          </a:effectLst>
+        </a:effectStyle>
+        <a:effectStyle>
+          <a:effectLst>
+            <a:outerShdw blurRad="152400" dist="66675" dir="5400000">
+              <a:srgbClr val="2F5EA8">
+                <a:alpha val="10000"/>
+              </a:srgbClr>
+            </a:outerShdw>
+          </a:effectLst>
+        </a:effectStyle>
+        <a:effectStyle>
+          <a:effectLst>
+            <a:outerShdw blurRad="171450" dist="76200" dir="5400000">
+              <a:srgbClr val="2F5EA8">
+                <a:alpha val="16000"/>
+              </a:srgbClr>
+            </a:outerShdw>
+          </a:effectLst>
+        </a:effectStyle>
+        <a:effectStyle>
+          <a:effectLst>
+            <a:outerShdw blurRad="114300" dist="47625" dir="5400000">
+              <a:srgbClr val="2F5EA8">
+                <a:alpha val="7000"/>
+              </a:srgbClr>
+            </a:outerShdw>
+          </a:effectLst>
+        </a:effectStyle>
+        <a:effectStyle>
+          <a:effectLst>
+            <a:outerShdw blurRad="95250" dist="38100" dir="5400000">
+              <a:srgbClr val="2F5EA8">
+                <a:alpha val="8000"/>
+              </a:srgbClr>
+            </a:outerShdw>
+          </a:effectLst>
+        </a:effectStyle>
+        <a:effectStyle>
+          <a:effectLst>
+            <a:outerShdw blurRad="209550" dist="95250" dir="5400000">
+              <a:srgbClr val="2F5EA8">
+                <a:alpha val="8000"/>
+              </a:srgbClr>
+            </a:outerShdw>
+          </a:effectLst>
+        </a:effectStyle>
+        <a:effectStyle>
+          <a:effectLst>
+            <a:outerShdw blurRad="133350" dist="57150" dir="5400000">
+              <a:srgbClr val="2F5EA8">
+                <a:alpha val="18000"/>
+              </a:srgbClr>
+            </a:outerShdw>
+          </a:effectLst>
+        </a:effectStyle>
+        <a:effectStyle>
+          <a:effectLst>
+            <a:outerShdw blurRad="200025" dist="85725" dir="5400000">
+              <a:srgbClr val="2F5EA8">
+                <a:alpha val="14000"/>
+              </a:srgbClr>
+            </a:outerShdw>
+          </a:effectLst>
+        </a:effectStyle>
+        <a:effectStyle>
+          <a:effectLst>
+            <a:outerShdw blurRad="171450" dist="76200" dir="5400000">
+              <a:srgbClr val="264E80">
+                <a:alpha val="10000"/>
+              </a:srgbClr>
+            </a:outerShdw>
+          </a:effectLst>
+        </a:effectStyle>
+        <a:effectStyle>
+          <a:effectLst>
+            <a:outerShdw blurRad="171450" dist="76200" dir="5400000">
+              <a:srgbClr val="1F497E">
+                <a:alpha val="8000"/>
+              </a:srgbClr>
+            </a:outerShdw>
+          </a:effectLst>
+        </a:effectStyle>
+        <a:effectStyle>
+          <a:effectLst>
             <a:outerShdw blurRad="95250" dist="38100" dir="5400000">
               <a:srgbClr val="2F5EA8">
                 <a:alpha val="16000"/>
-              </a:srgbClr>
-            </a:outerShdw>
-          </a:effectLst>
-        </a:effectStyle>
-        <a:effectStyle>
-          <a:effectLst>
-            <a:outerShdw blurRad="171450" dist="76200" dir="5400000">
-              <a:srgbClr val="2F5EA8">
-                <a:alpha val="16000"/>
-              </a:srgbClr>
-            </a:outerShdw>
-          </a:effectLst>
-        </a:effectStyle>
-        <a:effectStyle>
-          <a:effectLst>
-            <a:outerShdw blurRad="152400" dist="66675" dir="5400000">
-              <a:srgbClr val="2F5EA8">
-                <a:alpha val="10000"/>
-              </a:srgbClr>
-            </a:outerShdw>
-          </a:effectLst>
-        </a:effectStyle>
-        <a:effectStyle>
-          <a:effectLst>
-            <a:outerShdw blurRad="152400" dist="66675" dir="5400000">
-              <a:srgbClr val="2F5EA8">
-                <a:alpha val="9000"/>
               </a:srgbClr>
             </a:outerShdw>
           </a:effectLst>
@@ -551,7 +623,7 @@
   </p:cSld>
   <p:clrMap bg1="lt1" tx1="dk1" bg2="lt2" tx2="dk2" accent1="accent1" accent2="accent2" accent3="accent3" accent4="accent4" accent5="accent5" accent6="accent6" hlink="hlink" folHlink="folHlink"/>
   <p:sldLayoutIdLst>
-    <p:sldLayoutId xmlns:r="http://schemas.openxmlformats.org/officeDocument/2006/relationships" id="2147483649" r:id="Rd1bdd53d42eb41bb"/>
+    <p:sldLayoutId xmlns:r="http://schemas.openxmlformats.org/officeDocument/2006/relationships" id="2147483649" r:id="R2e233de521e04512"/>
   </p:sldLayoutIdLst>
   <p:txStyles>
     <p:titleStyle>
@@ -1036,36 +1108,108 @@
         </a:effectStyle>
         <a:effectStyle>
           <a:effectLst>
+            <a:outerShdw blurRad="266700" dist="114300" dir="5400000">
+              <a:srgbClr val="2F5EA8">
+                <a:alpha val="22000"/>
+              </a:srgbClr>
+            </a:outerShdw>
+          </a:effectLst>
+        </a:effectStyle>
+        <a:effectStyle>
+          <a:effectLst>
+            <a:outerShdw blurRad="152400" dist="66675" dir="5400000">
+              <a:srgbClr val="2F5EA8">
+                <a:alpha val="9000"/>
+              </a:srgbClr>
+            </a:outerShdw>
+          </a:effectLst>
+        </a:effectStyle>
+        <a:effectStyle>
+          <a:effectLst>
+            <a:outerShdw blurRad="152400" dist="66675" dir="5400000">
+              <a:srgbClr val="2F5EA8">
+                <a:alpha val="10000"/>
+              </a:srgbClr>
+            </a:outerShdw>
+          </a:effectLst>
+        </a:effectStyle>
+        <a:effectStyle>
+          <a:effectLst>
+            <a:outerShdw blurRad="171450" dist="76200" dir="5400000">
+              <a:srgbClr val="2F5EA8">
+                <a:alpha val="16000"/>
+              </a:srgbClr>
+            </a:outerShdw>
+          </a:effectLst>
+        </a:effectStyle>
+        <a:effectStyle>
+          <a:effectLst>
+            <a:outerShdw blurRad="114300" dist="47625" dir="5400000">
+              <a:srgbClr val="2F5EA8">
+                <a:alpha val="7000"/>
+              </a:srgbClr>
+            </a:outerShdw>
+          </a:effectLst>
+        </a:effectStyle>
+        <a:effectStyle>
+          <a:effectLst>
+            <a:outerShdw blurRad="95250" dist="38100" dir="5400000">
+              <a:srgbClr val="2F5EA8">
+                <a:alpha val="8000"/>
+              </a:srgbClr>
+            </a:outerShdw>
+          </a:effectLst>
+        </a:effectStyle>
+        <a:effectStyle>
+          <a:effectLst>
+            <a:outerShdw blurRad="209550" dist="95250" dir="5400000">
+              <a:srgbClr val="2F5EA8">
+                <a:alpha val="8000"/>
+              </a:srgbClr>
+            </a:outerShdw>
+          </a:effectLst>
+        </a:effectStyle>
+        <a:effectStyle>
+          <a:effectLst>
+            <a:outerShdw blurRad="133350" dist="57150" dir="5400000">
+              <a:srgbClr val="2F5EA8">
+                <a:alpha val="18000"/>
+              </a:srgbClr>
+            </a:outerShdw>
+          </a:effectLst>
+        </a:effectStyle>
+        <a:effectStyle>
+          <a:effectLst>
+            <a:outerShdw blurRad="200025" dist="85725" dir="5400000">
+              <a:srgbClr val="2F5EA8">
+                <a:alpha val="14000"/>
+              </a:srgbClr>
+            </a:outerShdw>
+          </a:effectLst>
+        </a:effectStyle>
+        <a:effectStyle>
+          <a:effectLst>
+            <a:outerShdw blurRad="171450" dist="76200" dir="5400000">
+              <a:srgbClr val="264E80">
+                <a:alpha val="10000"/>
+              </a:srgbClr>
+            </a:outerShdw>
+          </a:effectLst>
+        </a:effectStyle>
+        <a:effectStyle>
+          <a:effectLst>
+            <a:outerShdw blurRad="171450" dist="76200" dir="5400000">
+              <a:srgbClr val="1F497E">
+                <a:alpha val="8000"/>
+              </a:srgbClr>
+            </a:outerShdw>
+          </a:effectLst>
+        </a:effectStyle>
+        <a:effectStyle>
+          <a:effectLst>
             <a:outerShdw blurRad="95250" dist="38100" dir="5400000">
               <a:srgbClr val="2F5EA8">
                 <a:alpha val="16000"/>
-              </a:srgbClr>
-            </a:outerShdw>
-          </a:effectLst>
-        </a:effectStyle>
-        <a:effectStyle>
-          <a:effectLst>
-            <a:outerShdw blurRad="171450" dist="76200" dir="5400000">
-              <a:srgbClr val="2F5EA8">
-                <a:alpha val="16000"/>
-              </a:srgbClr>
-            </a:outerShdw>
-          </a:effectLst>
-        </a:effectStyle>
-        <a:effectStyle>
-          <a:effectLst>
-            <a:outerShdw blurRad="152400" dist="66675" dir="5400000">
-              <a:srgbClr val="2F5EA8">
-                <a:alpha val="10000"/>
-              </a:srgbClr>
-            </a:outerShdw>
-          </a:effectLst>
-        </a:effectStyle>
-        <a:effectStyle>
-          <a:effectLst>
-            <a:outerShdw blurRad="152400" dist="66675" dir="5400000">
-              <a:srgbClr val="2F5EA8">
-                <a:alpha val="9000"/>
               </a:srgbClr>
             </a:outerShdw>
           </a:effectLst>
@@ -1147,7 +1291,7 @@
           <p:cNvPr id="48" name="claim-evidence-link-0">
             <a:extLst xmlns:a="http://schemas.openxmlformats.org/drawingml/2006/main">
               <a:ext uri="{FF2B5EF4-FFF2-40B4-BE49-F238E27FC236}">
-                <a16:creationId xmlns:a16="http://schemas.microsoft.com/office/drawing/2014/main" id="{DFFFAE49-C5C7-4B1A-87FC-D2277CA523E8}"/>
+                <a16:creationId xmlns:a16="http://schemas.microsoft.com/office/drawing/2014/main" id="{8DC463E6-EB32-4240-B3F7-9737A89F9DB7}"/>
               </a:ext>
             </a:extLst>
           </p:cNvPr>
@@ -1178,7 +1322,7 @@
           <p:cNvPr id="2" name="claim-evidence-anchor-0">
             <a:extLst xmlns:a="http://schemas.openxmlformats.org/drawingml/2006/main">
               <a:ext uri="{FF2B5EF4-FFF2-40B4-BE49-F238E27FC236}">
-                <a16:creationId xmlns:a16="http://schemas.microsoft.com/office/drawing/2014/main" id="{64AEFE61-F1E2-4AE9-8472-D1FD4F8E1B39}"/>
+                <a16:creationId xmlns:a16="http://schemas.microsoft.com/office/drawing/2014/main" id="{FDD12CBA-85D9-4BF3-A33B-5238DC4B0109}"/>
               </a:ext>
             </a:extLst>
           </p:cNvPr>
@@ -1211,7 +1355,7 @@
           <p:cNvPr id="3" name="claim-evidence-link-1">
             <a:extLst xmlns:a="http://schemas.openxmlformats.org/drawingml/2006/main">
               <a:ext uri="{FF2B5EF4-FFF2-40B4-BE49-F238E27FC236}">
-                <a16:creationId xmlns:a16="http://schemas.microsoft.com/office/drawing/2014/main" id="{8799C93A-54CC-4968-AC6C-BC2CBB50015C}"/>
+                <a16:creationId xmlns:a16="http://schemas.microsoft.com/office/drawing/2014/main" id="{E1B48AEC-1AD4-4DAA-A0B2-A77D45A3D867}"/>
               </a:ext>
             </a:extLst>
           </p:cNvPr>
@@ -1242,7 +1386,7 @@
           <p:cNvPr id="4" name="claim-evidence-anchor-1">
             <a:extLst xmlns:a="http://schemas.openxmlformats.org/drawingml/2006/main">
               <a:ext uri="{FF2B5EF4-FFF2-40B4-BE49-F238E27FC236}">
-                <a16:creationId xmlns:a16="http://schemas.microsoft.com/office/drawing/2014/main" id="{B8EE5950-27D9-45F8-81B7-CE0127D4DC3C}"/>
+                <a16:creationId xmlns:a16="http://schemas.microsoft.com/office/drawing/2014/main" id="{E6A3EBE0-A581-4A2A-B9B6-98C45AA6ABC5}"/>
               </a:ext>
             </a:extLst>
           </p:cNvPr>
@@ -1275,7 +1419,7 @@
           <p:cNvPr id="5" name="claim-evidence-link-2">
             <a:extLst xmlns:a="http://schemas.openxmlformats.org/drawingml/2006/main">
               <a:ext uri="{FF2B5EF4-FFF2-40B4-BE49-F238E27FC236}">
-                <a16:creationId xmlns:a16="http://schemas.microsoft.com/office/drawing/2014/main" id="{1D8B28B8-C075-470E-A149-4904C1153D11}"/>
+                <a16:creationId xmlns:a16="http://schemas.microsoft.com/office/drawing/2014/main" id="{6AB8BCF9-EB7F-4ECF-91C4-FADF200ABC24}"/>
               </a:ext>
             </a:extLst>
           </p:cNvPr>
@@ -1306,7 +1450,7 @@
           <p:cNvPr id="6" name="claim-evidence-anchor-2">
             <a:extLst xmlns:a="http://schemas.openxmlformats.org/drawingml/2006/main">
               <a:ext uri="{FF2B5EF4-FFF2-40B4-BE49-F238E27FC236}">
-                <a16:creationId xmlns:a16="http://schemas.microsoft.com/office/drawing/2014/main" id="{24654B61-8148-47F5-9938-5DF0C611505F}"/>
+                <a16:creationId xmlns:a16="http://schemas.microsoft.com/office/drawing/2014/main" id="{51E6CDB2-A1F1-4C22-8BAD-56DF7FF4058D}"/>
               </a:ext>
             </a:extLst>
           </p:cNvPr>
@@ -1339,7 +1483,7 @@
           <p:cNvPr id="7" name="evidence-bus-link-0">
             <a:extLst xmlns:a="http://schemas.openxmlformats.org/drawingml/2006/main">
               <a:ext uri="{FF2B5EF4-FFF2-40B4-BE49-F238E27FC236}">
-                <a16:creationId xmlns:a16="http://schemas.microsoft.com/office/drawing/2014/main" id="{E8EA9D4E-8095-463F-B2FD-CE9E6FA1CA03}"/>
+                <a16:creationId xmlns:a16="http://schemas.microsoft.com/office/drawing/2014/main" id="{04DC8203-5EBF-4C80-9AD4-C9381C929382}"/>
               </a:ext>
             </a:extLst>
           </p:cNvPr>
@@ -1370,7 +1514,7 @@
           <p:cNvPr id="8" name="evidence-bus-anchor-0">
             <a:extLst xmlns:a="http://schemas.openxmlformats.org/drawingml/2006/main">
               <a:ext uri="{FF2B5EF4-FFF2-40B4-BE49-F238E27FC236}">
-                <a16:creationId xmlns:a16="http://schemas.microsoft.com/office/drawing/2014/main" id="{4557A5B9-3B44-4EF8-AF11-F835A819A91D}"/>
+                <a16:creationId xmlns:a16="http://schemas.microsoft.com/office/drawing/2014/main" id="{9741F2AA-E7EA-4D59-BEF1-6DDA949BC24B}"/>
               </a:ext>
             </a:extLst>
           </p:cNvPr>
@@ -1403,7 +1547,7 @@
           <p:cNvPr id="9" name="evidence-bus-link-1">
             <a:extLst xmlns:a="http://schemas.openxmlformats.org/drawingml/2006/main">
               <a:ext uri="{FF2B5EF4-FFF2-40B4-BE49-F238E27FC236}">
-                <a16:creationId xmlns:a16="http://schemas.microsoft.com/office/drawing/2014/main" id="{D9B25317-06B2-4AA5-85C7-2E8822659D6E}"/>
+                <a16:creationId xmlns:a16="http://schemas.microsoft.com/office/drawing/2014/main" id="{413A2F9A-5744-49E5-9EDF-75957246AF5B}"/>
               </a:ext>
             </a:extLst>
           </p:cNvPr>
@@ -1434,7 +1578,7 @@
           <p:cNvPr id="10" name="evidence-bus-anchor-1">
             <a:extLst xmlns:a="http://schemas.openxmlformats.org/drawingml/2006/main">
               <a:ext uri="{FF2B5EF4-FFF2-40B4-BE49-F238E27FC236}">
-                <a16:creationId xmlns:a16="http://schemas.microsoft.com/office/drawing/2014/main" id="{5C2D4F7E-B111-48FE-9D73-A05DBBB852F9}"/>
+                <a16:creationId xmlns:a16="http://schemas.microsoft.com/office/drawing/2014/main" id="{5CACA6D5-FFE7-4CAA-8B10-E2B6E31305AC}"/>
               </a:ext>
             </a:extLst>
           </p:cNvPr>
@@ -1467,7 +1611,7 @@
           <p:cNvPr id="11" name="evidence-bus-link-2">
             <a:extLst xmlns:a="http://schemas.openxmlformats.org/drawingml/2006/main">
               <a:ext uri="{FF2B5EF4-FFF2-40B4-BE49-F238E27FC236}">
-                <a16:creationId xmlns:a16="http://schemas.microsoft.com/office/drawing/2014/main" id="{E5C5F644-1206-4252-B1A2-F40A8F87E981}"/>
+                <a16:creationId xmlns:a16="http://schemas.microsoft.com/office/drawing/2014/main" id="{29F4F9C4-3DD0-44B6-909E-985567E6F91C}"/>
               </a:ext>
             </a:extLst>
           </p:cNvPr>
@@ -1498,7 +1642,7 @@
           <p:cNvPr id="12" name="evidence-bus-anchor-2">
             <a:extLst xmlns:a="http://schemas.openxmlformats.org/drawingml/2006/main">
               <a:ext uri="{FF2B5EF4-FFF2-40B4-BE49-F238E27FC236}">
-                <a16:creationId xmlns:a16="http://schemas.microsoft.com/office/drawing/2014/main" id="{795D0F61-74B4-4E31-B5EE-03BC749A1D45}"/>
+                <a16:creationId xmlns:a16="http://schemas.microsoft.com/office/drawing/2014/main" id="{6FC158F0-CDED-4565-84D5-93675173A2CD}"/>
               </a:ext>
             </a:extLst>
           </p:cNvPr>
@@ -1531,7 +1675,7 @@
           <p:cNvPr id="13" name="evidence-proof-bus">
             <a:extLst xmlns:a="http://schemas.openxmlformats.org/drawingml/2006/main">
               <a:ext uri="{FF2B5EF4-FFF2-40B4-BE49-F238E27FC236}">
-                <a16:creationId xmlns:a16="http://schemas.microsoft.com/office/drawing/2014/main" id="{B6A42898-2660-4628-A8EC-C1A74AE6A0D6}"/>
+                <a16:creationId xmlns:a16="http://schemas.microsoft.com/office/drawing/2014/main" id="{1570B7E8-CAB8-4898-9662-3D7FD5C38193}"/>
               </a:ext>
             </a:extLst>
           </p:cNvPr>
@@ -1562,7 +1706,7 @@
           <p:cNvPr id="14" name="proof-conclusion-link">
             <a:extLst xmlns:a="http://schemas.openxmlformats.org/drawingml/2006/main">
               <a:ext uri="{FF2B5EF4-FFF2-40B4-BE49-F238E27FC236}">
-                <a16:creationId xmlns:a16="http://schemas.microsoft.com/office/drawing/2014/main" id="{149376A5-AAEF-4548-8C33-BBDCCE1CBBAB}"/>
+                <a16:creationId xmlns:a16="http://schemas.microsoft.com/office/drawing/2014/main" id="{35471D01-FD42-4C48-8825-1602C2D0F8B7}"/>
               </a:ext>
             </a:extLst>
           </p:cNvPr>
@@ -1593,7 +1737,7 @@
           <p:cNvPr id="15" name="proof-conclusion-arrow">
             <a:extLst xmlns:a="http://schemas.openxmlformats.org/drawingml/2006/main">
               <a:ext uri="{FF2B5EF4-FFF2-40B4-BE49-F238E27FC236}">
-                <a16:creationId xmlns:a16="http://schemas.microsoft.com/office/drawing/2014/main" id="{588F468D-A364-4F0C-9D2D-D091D12FF38D}"/>
+                <a16:creationId xmlns:a16="http://schemas.microsoft.com/office/drawing/2014/main" id="{FD2A482F-F7B4-4FCF-AF0C-48E6AFE8BC22}"/>
               </a:ext>
             </a:extLst>
           </p:cNvPr>
@@ -1727,7 +1871,7 @@
           <p:cNvPr id="16" name="phase-line">
             <a:extLst xmlns:a="http://schemas.openxmlformats.org/drawingml/2006/main">
               <a:ext uri="{FF2B5EF4-FFF2-40B4-BE49-F238E27FC236}">
-                <a16:creationId xmlns:a16="http://schemas.microsoft.com/office/drawing/2014/main" id="{A1AD364A-DB05-4C6C-8053-BD5E1468CED8}"/>
+                <a16:creationId xmlns:a16="http://schemas.microsoft.com/office/drawing/2014/main" id="{7078149B-C58B-40D3-B268-7F7A128DC71A}"/>
               </a:ext>
             </a:extLst>
           </p:cNvPr>
@@ -1758,7 +1902,7 @@
           <p:cNvPr id="17" name="phase-claim-count">
             <a:extLst xmlns:a="http://schemas.openxmlformats.org/drawingml/2006/main">
               <a:ext uri="{FF2B5EF4-FFF2-40B4-BE49-F238E27FC236}">
-                <a16:creationId xmlns:a16="http://schemas.microsoft.com/office/drawing/2014/main" id="{D592972A-8C25-4670-B220-C09974DBB40B}"/>
+                <a16:creationId xmlns:a16="http://schemas.microsoft.com/office/drawing/2014/main" id="{69FB13D2-F9DB-44AA-9A49-7DC9803368BF}"/>
               </a:ext>
             </a:extLst>
           </p:cNvPr>
@@ -1788,73 +1932,11 @@
         <p:style>
           <a:lnRef xmlns:a="http://schemas.openxmlformats.org/drawingml/2006/main" idx="0"/>
           <a:fillRef xmlns:a="http://schemas.openxmlformats.org/drawingml/2006/main" idx="0"/>
-          <a:effectRef xmlns:a="http://schemas.openxmlformats.org/drawingml/2006/main" idx="10"/>
+          <a:effectRef xmlns:a="http://schemas.openxmlformats.org/drawingml/2006/main" idx="21"/>
           <a:fontRef xmlns:a="http://schemas.openxmlformats.org/drawingml/2006/main" idx="major"/>
         </p:style>
         <p:txBody>
-          <a:bodyPr xmlns:a="http://schemas.openxmlformats.org/drawingml/2006/main" lIns="0" tIns="0" rIns="0" bIns="0" anchor="ctr">
-            <a:noAutofit/>
-          </a:bodyPr>
-          <a:lstStyle xmlns:a="http://schemas.openxmlformats.org/drawingml/2006/main"/>
-          <a:p xmlns:a="http://schemas.openxmlformats.org/drawingml/2006/main">
-            <a:pPr algn="ctr">
-              <a:lnSpc>
-                <a:spcPct val="100000"/>
-              </a:lnSpc>
-              <a:buNone/>
-              <a:defRPr sz="1800" b="1" i="0">
-                <a:solidFill>
-                  <a:srgbClr val="FFFFFF"/>
-                </a:solidFill>
-                <a:latin typeface="Microsoft YaHei"/>
-                <a:ea typeface="Microsoft YaHei"/>
-                <a:cs typeface="Microsoft YaHei"/>
-              </a:defRPr>
-            </a:pPr>
-            <a:r>
-              <a:rPr sz="1800" b="1" i="0">
-                <a:solidFill>
-                  <a:srgbClr val="FFFFFF"/>
-                </a:solidFill>
-                <a:latin typeface="Microsoft YaHei"/>
-                <a:ea typeface="Microsoft YaHei"/>
-                <a:cs typeface="Microsoft YaHei"/>
-              </a:rPr>
-              <a:t>1</a:t>
-            </a:r>
-          </a:p>
-        </p:txBody>
-      </p:sp>
-      <p:sp>
-        <p:nvSpPr>
-          <p:cNvPr id="18" name="phase-claim-label">
-            <a:extLst xmlns:a="http://schemas.openxmlformats.org/drawingml/2006/main">
-              <a:ext uri="{FF2B5EF4-FFF2-40B4-BE49-F238E27FC236}">
-                <a16:creationId xmlns:a16="http://schemas.microsoft.com/office/drawing/2014/main" id="{32320598-3C7F-4938-8EFD-1B64B5C7561C}"/>
-              </a:ext>
-            </a:extLst>
-          </p:cNvPr>
-          <p:cNvSpPr>
-            <a:spLocks xmlns:a="http://schemas.openxmlformats.org/drawingml/2006/main" noGrp="1"/>
-          </p:cNvSpPr>
-          <p:nvPr/>
-        </p:nvSpPr>
-        <p:spPr>
-          <a:xfrm xmlns:a="http://schemas.openxmlformats.org/drawingml/2006/main" rot="0">
-            <a:off x="633565" y="2238375"/>
-            <a:ext cx="466277" cy="215951"/>
-          </a:xfrm>
-          <a:prstGeom xmlns:a="http://schemas.openxmlformats.org/drawingml/2006/main" prst="rect">
-            <a:avLst/>
-          </a:prstGeom>
-          <a:noFill xmlns:a="http://schemas.openxmlformats.org/drawingml/2006/main"/>
-          <a:ln xmlns:a="http://schemas.openxmlformats.org/drawingml/2006/main" w="0">
-            <a:noFill/>
-            <a:prstDash val="solid"/>
-          </a:ln>
-        </p:spPr>
-        <p:txBody>
-          <a:bodyPr xmlns:a="http://schemas.openxmlformats.org/drawingml/2006/main" lIns="0" tIns="0" rIns="0" bIns="0" anchor="ctr">
+          <a:bodyPr xmlns:a="http://schemas.openxmlformats.org/drawingml/2006/main" wrap="none" lIns="0" tIns="0" rIns="0" bIns="0" anchor="ctr">
             <a:noAutofit/>
           </a:bodyPr>
           <a:lstStyle xmlns:a="http://schemas.openxmlformats.org/drawingml/2006/main"/>
@@ -1866,7 +1948,7 @@
               <a:buNone/>
               <a:defRPr sz="1700" b="1" i="0">
                 <a:solidFill>
-                  <a:srgbClr val="4D6F9E"/>
+                  <a:srgbClr val="FFFFFF"/>
                 </a:solidFill>
                 <a:latin typeface="Microsoft YaHei"/>
                 <a:ea typeface="Microsoft YaHei"/>
@@ -1876,57 +1958,47 @@
             <a:r>
               <a:rPr sz="1700" b="1" i="0">
                 <a:solidFill>
-                  <a:srgbClr val="4D6F9E"/>
+                  <a:srgbClr val="FFFFFF"/>
                 </a:solidFill>
                 <a:latin typeface="Microsoft YaHei"/>
                 <a:ea typeface="Microsoft YaHei"/>
                 <a:cs typeface="Microsoft YaHei"/>
               </a:rPr>
-              <a:t>论点</a:t>
+              <a:t>1</a:t>
             </a:r>
           </a:p>
         </p:txBody>
       </p:sp>
       <p:sp>
         <p:nvSpPr>
-          <p:cNvPr id="19" name="phase-evidence-count">
-            <a:extLst xmlns:a="http://schemas.openxmlformats.org/drawingml/2006/main">
-              <a:ext uri="{FF2B5EF4-FFF2-40B4-BE49-F238E27FC236}">
-                <a16:creationId xmlns:a16="http://schemas.microsoft.com/office/drawing/2014/main" id="{3C97978A-0AA1-43DF-BC3B-7DBD7C5803AA}"/>
-              </a:ext>
-            </a:extLst>
-          </p:cNvPr>
-          <p:cNvSpPr>
-            <a:spLocks xmlns:a="http://schemas.openxmlformats.org/drawingml/2006/main" noGrp="1"/>
-          </p:cNvSpPr>
-          <p:nvPr/>
-        </p:nvSpPr>
-        <p:spPr>
-          <a:xfrm xmlns:a="http://schemas.openxmlformats.org/drawingml/2006/main" rot="0">
-            <a:off x="676275" y="3657600"/>
-            <a:ext cx="381000" cy="381000"/>
-          </a:xfrm>
-          <a:prstGeom xmlns:a="http://schemas.openxmlformats.org/drawingml/2006/main" prst="ellipse">
+          <p:cNvPr id="18" name="phase-claim-label">
+            <a:extLst xmlns:a="http://schemas.openxmlformats.org/drawingml/2006/main">
+              <a:ext uri="{FF2B5EF4-FFF2-40B4-BE49-F238E27FC236}">
+                <a16:creationId xmlns:a16="http://schemas.microsoft.com/office/drawing/2014/main" id="{46D66197-E3CD-4CC2-8B11-A3CF98A33CE5}"/>
+              </a:ext>
+            </a:extLst>
+          </p:cNvPr>
+          <p:cNvSpPr>
+            <a:spLocks xmlns:a="http://schemas.openxmlformats.org/drawingml/2006/main" noGrp="1"/>
+          </p:cNvSpPr>
+          <p:nvPr/>
+        </p:nvSpPr>
+        <p:spPr>
+          <a:xfrm xmlns:a="http://schemas.openxmlformats.org/drawingml/2006/main" rot="0">
+            <a:off x="660949" y="2238375"/>
+            <a:ext cx="411509" cy="190500"/>
+          </a:xfrm>
+          <a:prstGeom xmlns:a="http://schemas.openxmlformats.org/drawingml/2006/main" prst="rect">
             <a:avLst/>
           </a:prstGeom>
-          <a:solidFill xmlns:a="http://schemas.openxmlformats.org/drawingml/2006/main">
-            <a:srgbClr val="2F5EA8"/>
-          </a:solidFill>
-          <a:ln xmlns:a="http://schemas.openxmlformats.org/drawingml/2006/main" w="9525">
-            <a:solidFill>
-              <a:srgbClr val="BFD3ED"/>
-            </a:solidFill>
-            <a:prstDash val="solid"/>
-          </a:ln>
-        </p:spPr>
-        <p:style>
-          <a:lnRef xmlns:a="http://schemas.openxmlformats.org/drawingml/2006/main" idx="0"/>
-          <a:fillRef xmlns:a="http://schemas.openxmlformats.org/drawingml/2006/main" idx="0"/>
-          <a:effectRef xmlns:a="http://schemas.openxmlformats.org/drawingml/2006/main" idx="10"/>
-          <a:fontRef xmlns:a="http://schemas.openxmlformats.org/drawingml/2006/main" idx="major"/>
-        </p:style>
+          <a:noFill xmlns:a="http://schemas.openxmlformats.org/drawingml/2006/main"/>
+          <a:ln xmlns:a="http://schemas.openxmlformats.org/drawingml/2006/main" w="0">
+            <a:noFill/>
+            <a:prstDash val="solid"/>
+          </a:ln>
+        </p:spPr>
         <p:txBody>
-          <a:bodyPr xmlns:a="http://schemas.openxmlformats.org/drawingml/2006/main" lIns="0" tIns="0" rIns="0" bIns="0" anchor="ctr">
+          <a:bodyPr xmlns:a="http://schemas.openxmlformats.org/drawingml/2006/main" wrap="none" lIns="0" tIns="0" rIns="0" bIns="0" anchor="ctr">
             <a:noAutofit/>
           </a:bodyPr>
           <a:lstStyle xmlns:a="http://schemas.openxmlformats.org/drawingml/2006/main"/>
@@ -1936,9 +2008,9 @@
                 <a:spcPct val="100000"/>
               </a:lnSpc>
               <a:buNone/>
-              <a:defRPr sz="1800" b="1" i="0">
-                <a:solidFill>
-                  <a:srgbClr val="FFFFFF"/>
+              <a:defRPr sz="1500" b="1" i="0">
+                <a:solidFill>
+                  <a:srgbClr val="4D6F9E"/>
                 </a:solidFill>
                 <a:latin typeface="Microsoft YaHei"/>
                 <a:ea typeface="Microsoft YaHei"/>
@@ -1946,49 +2018,59 @@
               </a:defRPr>
             </a:pPr>
             <a:r>
-              <a:rPr sz="1800" b="1" i="0">
-                <a:solidFill>
-                  <a:srgbClr val="FFFFFF"/>
+              <a:rPr sz="1500" b="1" i="0">
+                <a:solidFill>
+                  <a:srgbClr val="4D6F9E"/>
                 </a:solidFill>
                 <a:latin typeface="Microsoft YaHei"/>
                 <a:ea typeface="Microsoft YaHei"/>
                 <a:cs typeface="Microsoft YaHei"/>
               </a:rPr>
-              <a:t>3</a:t>
+              <a:t>论点</a:t>
             </a:r>
           </a:p>
         </p:txBody>
       </p:sp>
       <p:sp>
         <p:nvSpPr>
-          <p:cNvPr id="20" name="phase-evidence-label">
-            <a:extLst xmlns:a="http://schemas.openxmlformats.org/drawingml/2006/main">
-              <a:ext uri="{FF2B5EF4-FFF2-40B4-BE49-F238E27FC236}">
-                <a16:creationId xmlns:a16="http://schemas.microsoft.com/office/drawing/2014/main" id="{A1F8A8DC-8572-44FB-B7F7-DD7A83793E3C}"/>
-              </a:ext>
-            </a:extLst>
-          </p:cNvPr>
-          <p:cNvSpPr>
-            <a:spLocks xmlns:a="http://schemas.openxmlformats.org/drawingml/2006/main" noGrp="1"/>
-          </p:cNvSpPr>
-          <p:nvPr/>
-        </p:nvSpPr>
-        <p:spPr>
-          <a:xfrm xmlns:a="http://schemas.openxmlformats.org/drawingml/2006/main" rot="0">
-            <a:off x="633565" y="4086225"/>
-            <a:ext cx="466277" cy="215951"/>
-          </a:xfrm>
-          <a:prstGeom xmlns:a="http://schemas.openxmlformats.org/drawingml/2006/main" prst="rect">
+          <p:cNvPr id="19" name="phase-evidence-count">
+            <a:extLst xmlns:a="http://schemas.openxmlformats.org/drawingml/2006/main">
+              <a:ext uri="{FF2B5EF4-FFF2-40B4-BE49-F238E27FC236}">
+                <a16:creationId xmlns:a16="http://schemas.microsoft.com/office/drawing/2014/main" id="{B5064BB2-393F-4690-9AF5-60D09E52B277}"/>
+              </a:ext>
+            </a:extLst>
+          </p:cNvPr>
+          <p:cNvSpPr>
+            <a:spLocks xmlns:a="http://schemas.openxmlformats.org/drawingml/2006/main" noGrp="1"/>
+          </p:cNvSpPr>
+          <p:nvPr/>
+        </p:nvSpPr>
+        <p:spPr>
+          <a:xfrm xmlns:a="http://schemas.openxmlformats.org/drawingml/2006/main" rot="0">
+            <a:off x="676275" y="3657600"/>
+            <a:ext cx="381000" cy="381000"/>
+          </a:xfrm>
+          <a:prstGeom xmlns:a="http://schemas.openxmlformats.org/drawingml/2006/main" prst="ellipse">
             <a:avLst/>
           </a:prstGeom>
-          <a:noFill xmlns:a="http://schemas.openxmlformats.org/drawingml/2006/main"/>
-          <a:ln xmlns:a="http://schemas.openxmlformats.org/drawingml/2006/main" w="0">
-            <a:noFill/>
-            <a:prstDash val="solid"/>
-          </a:ln>
-        </p:spPr>
+          <a:solidFill xmlns:a="http://schemas.openxmlformats.org/drawingml/2006/main">
+            <a:srgbClr val="2F5EA8"/>
+          </a:solidFill>
+          <a:ln xmlns:a="http://schemas.openxmlformats.org/drawingml/2006/main" w="9525">
+            <a:solidFill>
+              <a:srgbClr val="BFD3ED"/>
+            </a:solidFill>
+            <a:prstDash val="solid"/>
+          </a:ln>
+        </p:spPr>
+        <p:style>
+          <a:lnRef xmlns:a="http://schemas.openxmlformats.org/drawingml/2006/main" idx="0"/>
+          <a:fillRef xmlns:a="http://schemas.openxmlformats.org/drawingml/2006/main" idx="0"/>
+          <a:effectRef xmlns:a="http://schemas.openxmlformats.org/drawingml/2006/main" idx="21"/>
+          <a:fontRef xmlns:a="http://schemas.openxmlformats.org/drawingml/2006/main" idx="major"/>
+        </p:style>
         <p:txBody>
-          <a:bodyPr xmlns:a="http://schemas.openxmlformats.org/drawingml/2006/main" lIns="0" tIns="0" rIns="0" bIns="0" anchor="ctr">
+          <a:bodyPr xmlns:a="http://schemas.openxmlformats.org/drawingml/2006/main" wrap="none" lIns="0" tIns="0" rIns="0" bIns="0" anchor="ctr">
             <a:noAutofit/>
           </a:bodyPr>
           <a:lstStyle xmlns:a="http://schemas.openxmlformats.org/drawingml/2006/main"/>
@@ -2000,7 +2082,7 @@
               <a:buNone/>
               <a:defRPr sz="1700" b="1" i="0">
                 <a:solidFill>
-                  <a:srgbClr val="4D6F9E"/>
+                  <a:srgbClr val="FFFFFF"/>
                 </a:solidFill>
                 <a:latin typeface="Microsoft YaHei"/>
                 <a:ea typeface="Microsoft YaHei"/>
@@ -2010,57 +2092,47 @@
             <a:r>
               <a:rPr sz="1700" b="1" i="0">
                 <a:solidFill>
-                  <a:srgbClr val="4D6F9E"/>
+                  <a:srgbClr val="FFFFFF"/>
                 </a:solidFill>
                 <a:latin typeface="Microsoft YaHei"/>
                 <a:ea typeface="Microsoft YaHei"/>
                 <a:cs typeface="Microsoft YaHei"/>
               </a:rPr>
-              <a:t>证据</a:t>
+              <a:t>3</a:t>
             </a:r>
           </a:p>
         </p:txBody>
       </p:sp>
       <p:sp>
         <p:nvSpPr>
-          <p:cNvPr id="21" name="phase-conclusion-count">
-            <a:extLst xmlns:a="http://schemas.openxmlformats.org/drawingml/2006/main">
-              <a:ext uri="{FF2B5EF4-FFF2-40B4-BE49-F238E27FC236}">
-                <a16:creationId xmlns:a16="http://schemas.microsoft.com/office/drawing/2014/main" id="{43D7A25C-415F-4706-A378-FA9C92995A86}"/>
-              </a:ext>
-            </a:extLst>
-          </p:cNvPr>
-          <p:cNvSpPr>
-            <a:spLocks xmlns:a="http://schemas.openxmlformats.org/drawingml/2006/main" noGrp="1"/>
-          </p:cNvSpPr>
-          <p:nvPr/>
-        </p:nvSpPr>
-        <p:spPr>
-          <a:xfrm xmlns:a="http://schemas.openxmlformats.org/drawingml/2006/main" rot="0">
-            <a:off x="676275" y="5438775"/>
-            <a:ext cx="381000" cy="381000"/>
-          </a:xfrm>
-          <a:prstGeom xmlns:a="http://schemas.openxmlformats.org/drawingml/2006/main" prst="ellipse">
+          <p:cNvPr id="20" name="phase-evidence-label">
+            <a:extLst xmlns:a="http://schemas.openxmlformats.org/drawingml/2006/main">
+              <a:ext uri="{FF2B5EF4-FFF2-40B4-BE49-F238E27FC236}">
+                <a16:creationId xmlns:a16="http://schemas.microsoft.com/office/drawing/2014/main" id="{EE37592B-F7D2-46DE-BED6-64873C0C138C}"/>
+              </a:ext>
+            </a:extLst>
+          </p:cNvPr>
+          <p:cNvSpPr>
+            <a:spLocks xmlns:a="http://schemas.openxmlformats.org/drawingml/2006/main" noGrp="1"/>
+          </p:cNvSpPr>
+          <p:nvPr/>
+        </p:nvSpPr>
+        <p:spPr>
+          <a:xfrm xmlns:a="http://schemas.openxmlformats.org/drawingml/2006/main" rot="0">
+            <a:off x="660949" y="4086225"/>
+            <a:ext cx="411509" cy="190500"/>
+          </a:xfrm>
+          <a:prstGeom xmlns:a="http://schemas.openxmlformats.org/drawingml/2006/main" prst="rect">
             <a:avLst/>
           </a:prstGeom>
-          <a:solidFill xmlns:a="http://schemas.openxmlformats.org/drawingml/2006/main">
-            <a:srgbClr val="2F5EA8"/>
-          </a:solidFill>
-          <a:ln xmlns:a="http://schemas.openxmlformats.org/drawingml/2006/main" w="9525">
-            <a:solidFill>
-              <a:srgbClr val="BFD3ED"/>
-            </a:solidFill>
-            <a:prstDash val="solid"/>
-          </a:ln>
-        </p:spPr>
-        <p:style>
-          <a:lnRef xmlns:a="http://schemas.openxmlformats.org/drawingml/2006/main" idx="0"/>
-          <a:fillRef xmlns:a="http://schemas.openxmlformats.org/drawingml/2006/main" idx="0"/>
-          <a:effectRef xmlns:a="http://schemas.openxmlformats.org/drawingml/2006/main" idx="10"/>
-          <a:fontRef xmlns:a="http://schemas.openxmlformats.org/drawingml/2006/main" idx="major"/>
-        </p:style>
+          <a:noFill xmlns:a="http://schemas.openxmlformats.org/drawingml/2006/main"/>
+          <a:ln xmlns:a="http://schemas.openxmlformats.org/drawingml/2006/main" w="0">
+            <a:noFill/>
+            <a:prstDash val="solid"/>
+          </a:ln>
+        </p:spPr>
         <p:txBody>
-          <a:bodyPr xmlns:a="http://schemas.openxmlformats.org/drawingml/2006/main" lIns="0" tIns="0" rIns="0" bIns="0" anchor="ctr">
+          <a:bodyPr xmlns:a="http://schemas.openxmlformats.org/drawingml/2006/main" wrap="none" lIns="0" tIns="0" rIns="0" bIns="0" anchor="ctr">
             <a:noAutofit/>
           </a:bodyPr>
           <a:lstStyle xmlns:a="http://schemas.openxmlformats.org/drawingml/2006/main"/>
@@ -2070,9 +2142,9 @@
                 <a:spcPct val="100000"/>
               </a:lnSpc>
               <a:buNone/>
-              <a:defRPr sz="1800" b="1" i="0">
-                <a:solidFill>
-                  <a:srgbClr val="FFFFFF"/>
+              <a:defRPr sz="1500" b="1" i="0">
+                <a:solidFill>
+                  <a:srgbClr val="4D6F9E"/>
                 </a:solidFill>
                 <a:latin typeface="Microsoft YaHei"/>
                 <a:ea typeface="Microsoft YaHei"/>
@@ -2080,49 +2152,59 @@
               </a:defRPr>
             </a:pPr>
             <a:r>
-              <a:rPr sz="1800" b="1" i="0">
-                <a:solidFill>
-                  <a:srgbClr val="FFFFFF"/>
+              <a:rPr sz="1500" b="1" i="0">
+                <a:solidFill>
+                  <a:srgbClr val="4D6F9E"/>
                 </a:solidFill>
                 <a:latin typeface="Microsoft YaHei"/>
                 <a:ea typeface="Microsoft YaHei"/>
                 <a:cs typeface="Microsoft YaHei"/>
               </a:rPr>
-              <a:t>1</a:t>
+              <a:t>证据</a:t>
             </a:r>
           </a:p>
         </p:txBody>
       </p:sp>
       <p:sp>
         <p:nvSpPr>
-          <p:cNvPr id="22" name="phase-conclusion-label">
-            <a:extLst xmlns:a="http://schemas.openxmlformats.org/drawingml/2006/main">
-              <a:ext uri="{FF2B5EF4-FFF2-40B4-BE49-F238E27FC236}">
-                <a16:creationId xmlns:a16="http://schemas.microsoft.com/office/drawing/2014/main" id="{48CB573F-D10A-4564-9F76-4DAD80235B8B}"/>
-              </a:ext>
-            </a:extLst>
-          </p:cNvPr>
-          <p:cNvSpPr>
-            <a:spLocks xmlns:a="http://schemas.openxmlformats.org/drawingml/2006/main" noGrp="1"/>
-          </p:cNvSpPr>
-          <p:nvPr/>
-        </p:nvSpPr>
-        <p:spPr>
-          <a:xfrm xmlns:a="http://schemas.openxmlformats.org/drawingml/2006/main" rot="0">
-            <a:off x="633565" y="5867400"/>
-            <a:ext cx="466277" cy="215951"/>
-          </a:xfrm>
-          <a:prstGeom xmlns:a="http://schemas.openxmlformats.org/drawingml/2006/main" prst="rect">
+          <p:cNvPr id="21" name="phase-conclusion-count">
+            <a:extLst xmlns:a="http://schemas.openxmlformats.org/drawingml/2006/main">
+              <a:ext uri="{FF2B5EF4-FFF2-40B4-BE49-F238E27FC236}">
+                <a16:creationId xmlns:a16="http://schemas.microsoft.com/office/drawing/2014/main" id="{9D7D7930-57EB-45E8-B63A-903C6B075000}"/>
+              </a:ext>
+            </a:extLst>
+          </p:cNvPr>
+          <p:cNvSpPr>
+            <a:spLocks xmlns:a="http://schemas.openxmlformats.org/drawingml/2006/main" noGrp="1"/>
+          </p:cNvSpPr>
+          <p:nvPr/>
+        </p:nvSpPr>
+        <p:spPr>
+          <a:xfrm xmlns:a="http://schemas.openxmlformats.org/drawingml/2006/main" rot="0">
+            <a:off x="676275" y="5438775"/>
+            <a:ext cx="381000" cy="381000"/>
+          </a:xfrm>
+          <a:prstGeom xmlns:a="http://schemas.openxmlformats.org/drawingml/2006/main" prst="ellipse">
             <a:avLst/>
           </a:prstGeom>
-          <a:noFill xmlns:a="http://schemas.openxmlformats.org/drawingml/2006/main"/>
-          <a:ln xmlns:a="http://schemas.openxmlformats.org/drawingml/2006/main" w="0">
-            <a:noFill/>
-            <a:prstDash val="solid"/>
-          </a:ln>
-        </p:spPr>
+          <a:solidFill xmlns:a="http://schemas.openxmlformats.org/drawingml/2006/main">
+            <a:srgbClr val="2F5EA8"/>
+          </a:solidFill>
+          <a:ln xmlns:a="http://schemas.openxmlformats.org/drawingml/2006/main" w="9525">
+            <a:solidFill>
+              <a:srgbClr val="BFD3ED"/>
+            </a:solidFill>
+            <a:prstDash val="solid"/>
+          </a:ln>
+        </p:spPr>
+        <p:style>
+          <a:lnRef xmlns:a="http://schemas.openxmlformats.org/drawingml/2006/main" idx="0"/>
+          <a:fillRef xmlns:a="http://schemas.openxmlformats.org/drawingml/2006/main" idx="0"/>
+          <a:effectRef xmlns:a="http://schemas.openxmlformats.org/drawingml/2006/main" idx="21"/>
+          <a:fontRef xmlns:a="http://schemas.openxmlformats.org/drawingml/2006/main" idx="major"/>
+        </p:style>
         <p:txBody>
-          <a:bodyPr xmlns:a="http://schemas.openxmlformats.org/drawingml/2006/main" lIns="0" tIns="0" rIns="0" bIns="0" anchor="ctr">
+          <a:bodyPr xmlns:a="http://schemas.openxmlformats.org/drawingml/2006/main" wrap="none" lIns="0" tIns="0" rIns="0" bIns="0" anchor="ctr">
             <a:noAutofit/>
           </a:bodyPr>
           <a:lstStyle xmlns:a="http://schemas.openxmlformats.org/drawingml/2006/main"/>
@@ -2134,7 +2216,7 @@
               <a:buNone/>
               <a:defRPr sz="1700" b="1" i="0">
                 <a:solidFill>
-                  <a:srgbClr val="4D6F9E"/>
+                  <a:srgbClr val="FFFFFF"/>
                 </a:solidFill>
                 <a:latin typeface="Microsoft YaHei"/>
                 <a:ea typeface="Microsoft YaHei"/>
@@ -2143,6 +2225,68 @@
             </a:pPr>
             <a:r>
               <a:rPr sz="1700" b="1" i="0">
+                <a:solidFill>
+                  <a:srgbClr val="FFFFFF"/>
+                </a:solidFill>
+                <a:latin typeface="Microsoft YaHei"/>
+                <a:ea typeface="Microsoft YaHei"/>
+                <a:cs typeface="Microsoft YaHei"/>
+              </a:rPr>
+              <a:t>1</a:t>
+            </a:r>
+          </a:p>
+        </p:txBody>
+      </p:sp>
+      <p:sp>
+        <p:nvSpPr>
+          <p:cNvPr id="22" name="phase-conclusion-label">
+            <a:extLst xmlns:a="http://schemas.openxmlformats.org/drawingml/2006/main">
+              <a:ext uri="{FF2B5EF4-FFF2-40B4-BE49-F238E27FC236}">
+                <a16:creationId xmlns:a16="http://schemas.microsoft.com/office/drawing/2014/main" id="{B373F720-9365-4D79-81F6-466FC4E45B61}"/>
+              </a:ext>
+            </a:extLst>
+          </p:cNvPr>
+          <p:cNvSpPr>
+            <a:spLocks xmlns:a="http://schemas.openxmlformats.org/drawingml/2006/main" noGrp="1"/>
+          </p:cNvSpPr>
+          <p:nvPr/>
+        </p:nvSpPr>
+        <p:spPr>
+          <a:xfrm xmlns:a="http://schemas.openxmlformats.org/drawingml/2006/main" rot="0">
+            <a:off x="660949" y="5867400"/>
+            <a:ext cx="411509" cy="190500"/>
+          </a:xfrm>
+          <a:prstGeom xmlns:a="http://schemas.openxmlformats.org/drawingml/2006/main" prst="rect">
+            <a:avLst/>
+          </a:prstGeom>
+          <a:noFill xmlns:a="http://schemas.openxmlformats.org/drawingml/2006/main"/>
+          <a:ln xmlns:a="http://schemas.openxmlformats.org/drawingml/2006/main" w="0">
+            <a:noFill/>
+            <a:prstDash val="solid"/>
+          </a:ln>
+        </p:spPr>
+        <p:txBody>
+          <a:bodyPr xmlns:a="http://schemas.openxmlformats.org/drawingml/2006/main" wrap="none" lIns="0" tIns="0" rIns="0" bIns="0" anchor="ctr">
+            <a:noAutofit/>
+          </a:bodyPr>
+          <a:lstStyle xmlns:a="http://schemas.openxmlformats.org/drawingml/2006/main"/>
+          <a:p xmlns:a="http://schemas.openxmlformats.org/drawingml/2006/main">
+            <a:pPr algn="ctr">
+              <a:lnSpc>
+                <a:spcPct val="100000"/>
+              </a:lnSpc>
+              <a:buNone/>
+              <a:defRPr sz="1500" b="1" i="0">
+                <a:solidFill>
+                  <a:srgbClr val="4D6F9E"/>
+                </a:solidFill>
+                <a:latin typeface="Microsoft YaHei"/>
+                <a:ea typeface="Microsoft YaHei"/>
+                <a:cs typeface="Microsoft YaHei"/>
+              </a:defRPr>
+            </a:pPr>
+            <a:r>
+              <a:rPr sz="1500" b="1" i="0">
                 <a:solidFill>
                   <a:srgbClr val="4D6F9E"/>
                 </a:solidFill>
@@ -2160,7 +2304,7 @@
           <p:cNvPr id="23" name="claim-underlay">
             <a:extLst xmlns:a="http://schemas.openxmlformats.org/drawingml/2006/main">
               <a:ext uri="{FF2B5EF4-FFF2-40B4-BE49-F238E27FC236}">
-                <a16:creationId xmlns:a16="http://schemas.microsoft.com/office/drawing/2014/main" id="{2F6DAB2D-C671-4DC2-ACE4-884F5FA75712}"/>
+                <a16:creationId xmlns:a16="http://schemas.microsoft.com/office/drawing/2014/main" id="{5B83C30E-6A28-49F2-BB1D-DE1CC6C90644}"/>
               </a:ext>
             </a:extLst>
           </p:cNvPr>
@@ -2193,7 +2337,7 @@
           <p:cNvPr id="24" name="claim-card">
             <a:extLst xmlns:a="http://schemas.openxmlformats.org/drawingml/2006/main">
               <a:ext uri="{FF2B5EF4-FFF2-40B4-BE49-F238E27FC236}">
-                <a16:creationId xmlns:a16="http://schemas.microsoft.com/office/drawing/2014/main" id="{FFF50AB3-E7E1-432B-AF34-63522CC6AA56}"/>
+                <a16:creationId xmlns:a16="http://schemas.microsoft.com/office/drawing/2014/main" id="{00A6B459-9D4D-4CEF-B3AE-E0A695D0DFFD}"/>
               </a:ext>
             </a:extLst>
           </p:cNvPr>
@@ -2234,7 +2378,7 @@
         <p:style>
           <a:lnRef xmlns:a="http://schemas.openxmlformats.org/drawingml/2006/main" idx="0"/>
           <a:fillRef xmlns:a="http://schemas.openxmlformats.org/drawingml/2006/main" idx="0"/>
-          <a:effectRef xmlns:a="http://schemas.openxmlformats.org/drawingml/2006/main" idx="11"/>
+          <a:effectRef xmlns:a="http://schemas.openxmlformats.org/drawingml/2006/main" idx="13"/>
           <a:fontRef xmlns:a="http://schemas.openxmlformats.org/drawingml/2006/main" idx="major"/>
         </p:style>
       </p:sp>
@@ -2243,7 +2387,7 @@
           <p:cNvPr id="25" name="claim-label">
             <a:extLst xmlns:a="http://schemas.openxmlformats.org/drawingml/2006/main">
               <a:ext uri="{FF2B5EF4-FFF2-40B4-BE49-F238E27FC236}">
-                <a16:creationId xmlns:a16="http://schemas.microsoft.com/office/drawing/2014/main" id="{89B0604E-96B0-4F2C-A935-28B6F1CAAC9B}"/>
+                <a16:creationId xmlns:a16="http://schemas.microsoft.com/office/drawing/2014/main" id="{4C67B19F-45D1-426D-A6D6-718305358889}"/>
               </a:ext>
             </a:extLst>
           </p:cNvPr>
@@ -2267,17 +2411,17 @@
           </a:ln>
         </p:spPr>
         <p:txBody>
-          <a:bodyPr xmlns:a="http://schemas.openxmlformats.org/drawingml/2006/main" lIns="0" tIns="0" rIns="0" bIns="0" anchor="ctr">
+          <a:bodyPr xmlns:a="http://schemas.openxmlformats.org/drawingml/2006/main" wrap="none" lIns="0" tIns="0" rIns="0" bIns="0" anchor="ctr">
             <a:noAutofit/>
           </a:bodyPr>
           <a:lstStyle xmlns:a="http://schemas.openxmlformats.org/drawingml/2006/main"/>
           <a:p xmlns:a="http://schemas.openxmlformats.org/drawingml/2006/main">
-            <a:pPr algn="l">
+            <a:pPr algn="ctr">
               <a:lnSpc>
                 <a:spcPct val="100000"/>
               </a:lnSpc>
               <a:buNone/>
-              <a:defRPr sz="1800" b="1" i="0">
+              <a:defRPr sz="1700" b="1" i="0">
                 <a:solidFill>
                   <a:srgbClr val="FFFFFF"/>
                 </a:solidFill>
@@ -2287,7 +2431,7 @@
               </a:defRPr>
             </a:pPr>
             <a:r>
-              <a:rPr sz="1800" b="1" i="0">
+              <a:rPr sz="1700" b="1" i="0">
                 <a:solidFill>
                   <a:srgbClr val="FFFFFF"/>
                 </a:solidFill>
@@ -2305,7 +2449,7 @@
           <p:cNvPr id="26" name="claim-divider">
             <a:extLst xmlns:a="http://schemas.openxmlformats.org/drawingml/2006/main">
               <a:ext uri="{FF2B5EF4-FFF2-40B4-BE49-F238E27FC236}">
-                <a16:creationId xmlns:a16="http://schemas.microsoft.com/office/drawing/2014/main" id="{F57DEE9E-0F5E-4E43-8919-024AD648EA30}"/>
+                <a16:creationId xmlns:a16="http://schemas.microsoft.com/office/drawing/2014/main" id="{3BD4BB21-5194-4C8B-AB2F-A03078F24868}"/>
               </a:ext>
             </a:extLst>
           </p:cNvPr>
@@ -2338,7 +2482,7 @@
           <p:cNvPr id="27" name="claim-title">
             <a:extLst xmlns:a="http://schemas.openxmlformats.org/drawingml/2006/main">
               <a:ext uri="{FF2B5EF4-FFF2-40B4-BE49-F238E27FC236}">
-                <a16:creationId xmlns:a16="http://schemas.microsoft.com/office/drawing/2014/main" id="{EF369F2D-B146-4745-81C0-44968C2C45E5}"/>
+                <a16:creationId xmlns:a16="http://schemas.microsoft.com/office/drawing/2014/main" id="{35ABC70C-E5F6-4191-8D9D-5290E2BBB265}"/>
               </a:ext>
             </a:extLst>
           </p:cNvPr>
@@ -2362,7 +2506,7 @@
           </a:ln>
         </p:spPr>
         <p:txBody>
-          <a:bodyPr xmlns:a="http://schemas.openxmlformats.org/drawingml/2006/main" lIns="0" tIns="0" rIns="0" bIns="0" anchor="ctr">
+          <a:bodyPr xmlns:a="http://schemas.openxmlformats.org/drawingml/2006/main" wrap="square" lIns="0" tIns="0" rIns="0" bIns="0" anchor="ctr">
             <a:noAutofit/>
           </a:bodyPr>
           <a:lstStyle xmlns:a="http://schemas.openxmlformats.org/drawingml/2006/main"/>
@@ -2400,7 +2544,7 @@
           <p:cNvPr id="28" name="claim-body">
             <a:extLst xmlns:a="http://schemas.openxmlformats.org/drawingml/2006/main">
               <a:ext uri="{FF2B5EF4-FFF2-40B4-BE49-F238E27FC236}">
-                <a16:creationId xmlns:a16="http://schemas.microsoft.com/office/drawing/2014/main" id="{6DAE6D14-C734-4988-8875-E34FDB35ABD7}"/>
+                <a16:creationId xmlns:a16="http://schemas.microsoft.com/office/drawing/2014/main" id="{8EB92093-BAF3-468D-B672-9C0D62AE8FB5}"/>
               </a:ext>
             </a:extLst>
           </p:cNvPr>
@@ -2424,7 +2568,7 @@
           </a:ln>
         </p:spPr>
         <p:txBody>
-          <a:bodyPr xmlns:a="http://schemas.openxmlformats.org/drawingml/2006/main" lIns="0" tIns="0" rIns="0" bIns="0" anchor="ctr">
+          <a:bodyPr xmlns:a="http://schemas.openxmlformats.org/drawingml/2006/main" wrap="square" lIns="0" tIns="0" rIns="0" bIns="0" anchor="ctr">
             <a:noAutofit/>
           </a:bodyPr>
           <a:lstStyle xmlns:a="http://schemas.openxmlformats.org/drawingml/2006/main"/>
@@ -2466,7 +2610,7 @@
           <p:cNvPr id="29" name="evidence-card-0">
             <a:extLst xmlns:a="http://schemas.openxmlformats.org/drawingml/2006/main">
               <a:ext uri="{FF2B5EF4-FFF2-40B4-BE49-F238E27FC236}">
-                <a16:creationId xmlns:a16="http://schemas.microsoft.com/office/drawing/2014/main" id="{4A4EE45E-92B2-480D-B1E0-5A314142F43C}"/>
+                <a16:creationId xmlns:a16="http://schemas.microsoft.com/office/drawing/2014/main" id="{47BCE2D7-F65F-4E99-8319-273105336F3D}"/>
               </a:ext>
             </a:extLst>
           </p:cNvPr>
@@ -2515,7 +2659,7 @@
           <p:cNvPr id="30" name="evidence-accent-0">
             <a:extLst xmlns:a="http://schemas.openxmlformats.org/drawingml/2006/main">
               <a:ext uri="{FF2B5EF4-FFF2-40B4-BE49-F238E27FC236}">
-                <a16:creationId xmlns:a16="http://schemas.microsoft.com/office/drawing/2014/main" id="{5BDC4B5B-354B-401C-A989-2AA5ABC42E1D}"/>
+                <a16:creationId xmlns:a16="http://schemas.microsoft.com/office/drawing/2014/main" id="{208760B4-D160-4FCB-8081-FF8A17FF6991}"/>
               </a:ext>
             </a:extLst>
           </p:cNvPr>
@@ -2556,7 +2700,7 @@
           <p:cNvPr id="31" name="evidence-number-0">
             <a:extLst xmlns:a="http://schemas.openxmlformats.org/drawingml/2006/main">
               <a:ext uri="{FF2B5EF4-FFF2-40B4-BE49-F238E27FC236}">
-                <a16:creationId xmlns:a16="http://schemas.microsoft.com/office/drawing/2014/main" id="{680ED3FD-DB6B-4FFD-B47F-99D777425783}"/>
+                <a16:creationId xmlns:a16="http://schemas.microsoft.com/office/drawing/2014/main" id="{EE2A0A22-679A-403D-AEF0-897266592E14}"/>
               </a:ext>
             </a:extLst>
           </p:cNvPr>
@@ -2584,17 +2728,17 @@
           </a:ln>
         </p:spPr>
         <p:txBody>
-          <a:bodyPr xmlns:a="http://schemas.openxmlformats.org/drawingml/2006/main" lIns="0" tIns="0" rIns="0" bIns="0" anchor="ctr">
+          <a:bodyPr xmlns:a="http://schemas.openxmlformats.org/drawingml/2006/main" wrap="none" lIns="0" tIns="0" rIns="0" bIns="0" anchor="ctr">
             <a:noAutofit/>
           </a:bodyPr>
           <a:lstStyle xmlns:a="http://schemas.openxmlformats.org/drawingml/2006/main"/>
           <a:p xmlns:a="http://schemas.openxmlformats.org/drawingml/2006/main">
-            <a:pPr algn="l">
+            <a:pPr algn="ctr">
               <a:lnSpc>
                 <a:spcPct val="100000"/>
               </a:lnSpc>
               <a:buNone/>
-              <a:defRPr sz="1700" b="1" i="0">
+              <a:defRPr sz="1500" b="1" i="0">
                 <a:solidFill>
                   <a:srgbClr val="FFFFFF"/>
                 </a:solidFill>
@@ -2604,7 +2748,7 @@
               </a:defRPr>
             </a:pPr>
             <a:r>
-              <a:rPr sz="1700" b="1" i="0">
+              <a:rPr sz="1500" b="1" i="0">
                 <a:solidFill>
                   <a:srgbClr val="FFFFFF"/>
                 </a:solidFill>
@@ -2622,7 +2766,7 @@
           <p:cNvPr id="32" name="evidence-title-0">
             <a:extLst xmlns:a="http://schemas.openxmlformats.org/drawingml/2006/main">
               <a:ext uri="{FF2B5EF4-FFF2-40B4-BE49-F238E27FC236}">
-                <a16:creationId xmlns:a16="http://schemas.microsoft.com/office/drawing/2014/main" id="{0E4D9361-3F50-4E19-864A-43C344BA5C26}"/>
+                <a16:creationId xmlns:a16="http://schemas.microsoft.com/office/drawing/2014/main" id="{93F296B8-A2DB-4234-9875-3FA176E37BE4}"/>
               </a:ext>
             </a:extLst>
           </p:cNvPr>
@@ -2646,7 +2790,7 @@
           </a:ln>
         </p:spPr>
         <p:txBody>
-          <a:bodyPr xmlns:a="http://schemas.openxmlformats.org/drawingml/2006/main" lIns="0" tIns="0" rIns="0" bIns="0" anchor="ctr">
+          <a:bodyPr xmlns:a="http://schemas.openxmlformats.org/drawingml/2006/main" wrap="none" lIns="0" tIns="0" rIns="0" bIns="0" anchor="ctr">
             <a:noAutofit/>
           </a:bodyPr>
           <a:lstStyle xmlns:a="http://schemas.openxmlformats.org/drawingml/2006/main"/>
@@ -2656,7 +2800,7 @@
                 <a:spcPct val="115000"/>
               </a:lnSpc>
               <a:buNone/>
-              <a:defRPr sz="1800" b="1" i="0">
+              <a:defRPr sz="1700" b="1" i="0">
                 <a:solidFill>
                   <a:srgbClr val="244B7F"/>
                 </a:solidFill>
@@ -2666,7 +2810,7 @@
               </a:defRPr>
             </a:pPr>
             <a:r>
-              <a:rPr sz="1800" b="1" i="0">
+              <a:rPr sz="1700" b="1" i="0">
                 <a:solidFill>
                   <a:srgbClr val="244B7F"/>
                 </a:solidFill>
@@ -2684,7 +2828,7 @@
           <p:cNvPr id="33" name="evidence-body-0">
             <a:extLst xmlns:a="http://schemas.openxmlformats.org/drawingml/2006/main">
               <a:ext uri="{FF2B5EF4-FFF2-40B4-BE49-F238E27FC236}">
-                <a16:creationId xmlns:a16="http://schemas.microsoft.com/office/drawing/2014/main" id="{ED62A0EA-3B66-450D-B439-270FF467B9A7}"/>
+                <a16:creationId xmlns:a16="http://schemas.microsoft.com/office/drawing/2014/main" id="{A4ED6619-F1C8-4724-BF7B-44FD4EA39A5F}"/>
               </a:ext>
             </a:extLst>
           </p:cNvPr>
@@ -2708,7 +2852,7 @@
           </a:ln>
         </p:spPr>
         <p:txBody>
-          <a:bodyPr xmlns:a="http://schemas.openxmlformats.org/drawingml/2006/main" lIns="0" tIns="0" rIns="0" bIns="0" anchor="t">
+          <a:bodyPr xmlns:a="http://schemas.openxmlformats.org/drawingml/2006/main" wrap="none" lIns="0" tIns="0" rIns="0" bIns="0" anchor="t">
             <a:noAutofit/>
           </a:bodyPr>
           <a:lstStyle xmlns:a="http://schemas.openxmlformats.org/drawingml/2006/main"/>
@@ -2718,7 +2862,7 @@
                 <a:spcPct val="128000"/>
               </a:lnSpc>
               <a:buNone/>
-              <a:defRPr sz="1700" b="0" i="0">
+              <a:defRPr sz="1500" b="0" i="0">
                 <a:solidFill>
                   <a:srgbClr val="53667D"/>
                 </a:solidFill>
@@ -2728,7 +2872,7 @@
               </a:defRPr>
             </a:pPr>
             <a:r>
-              <a:rPr sz="1700" b="0" i="0">
+              <a:rPr sz="1500" b="0" i="0">
                 <a:solidFill>
                   <a:srgbClr val="53667D"/>
                 </a:solidFill>
@@ -2746,7 +2890,7 @@
           <p:cNvPr id="34" name="evidence-card-1">
             <a:extLst xmlns:a="http://schemas.openxmlformats.org/drawingml/2006/main">
               <a:ext uri="{FF2B5EF4-FFF2-40B4-BE49-F238E27FC236}">
-                <a16:creationId xmlns:a16="http://schemas.microsoft.com/office/drawing/2014/main" id="{79759ECA-6E05-4623-B511-871874B6BECE}"/>
+                <a16:creationId xmlns:a16="http://schemas.microsoft.com/office/drawing/2014/main" id="{2DFC70E3-185C-486D-9E42-48C66D5539EA}"/>
               </a:ext>
             </a:extLst>
           </p:cNvPr>
@@ -2795,7 +2939,7 @@
           <p:cNvPr id="35" name="evidence-accent-1">
             <a:extLst xmlns:a="http://schemas.openxmlformats.org/drawingml/2006/main">
               <a:ext uri="{FF2B5EF4-FFF2-40B4-BE49-F238E27FC236}">
-                <a16:creationId xmlns:a16="http://schemas.microsoft.com/office/drawing/2014/main" id="{B556A09D-E0E0-4072-B8BB-D65675169CAA}"/>
+                <a16:creationId xmlns:a16="http://schemas.microsoft.com/office/drawing/2014/main" id="{0D35F806-E275-416C-B776-621A2DB596A4}"/>
               </a:ext>
             </a:extLst>
           </p:cNvPr>
@@ -2836,7 +2980,7 @@
           <p:cNvPr id="36" name="evidence-number-1">
             <a:extLst xmlns:a="http://schemas.openxmlformats.org/drawingml/2006/main">
               <a:ext uri="{FF2B5EF4-FFF2-40B4-BE49-F238E27FC236}">
-                <a16:creationId xmlns:a16="http://schemas.microsoft.com/office/drawing/2014/main" id="{CD6EE6F5-DDE4-4B5D-81F5-9AD38125D02F}"/>
+                <a16:creationId xmlns:a16="http://schemas.microsoft.com/office/drawing/2014/main" id="{AD2CB664-91E5-4020-A676-19065208AA47}"/>
               </a:ext>
             </a:extLst>
           </p:cNvPr>
@@ -2864,17 +3008,17 @@
           </a:ln>
         </p:spPr>
         <p:txBody>
-          <a:bodyPr xmlns:a="http://schemas.openxmlformats.org/drawingml/2006/main" lIns="0" tIns="0" rIns="0" bIns="0" anchor="ctr">
+          <a:bodyPr xmlns:a="http://schemas.openxmlformats.org/drawingml/2006/main" wrap="none" lIns="0" tIns="0" rIns="0" bIns="0" anchor="ctr">
             <a:noAutofit/>
           </a:bodyPr>
           <a:lstStyle xmlns:a="http://schemas.openxmlformats.org/drawingml/2006/main"/>
           <a:p xmlns:a="http://schemas.openxmlformats.org/drawingml/2006/main">
-            <a:pPr algn="l">
+            <a:pPr algn="ctr">
               <a:lnSpc>
                 <a:spcPct val="100000"/>
               </a:lnSpc>
               <a:buNone/>
-              <a:defRPr sz="1700" b="1" i="0">
+              <a:defRPr sz="1500" b="1" i="0">
                 <a:solidFill>
                   <a:srgbClr val="FFFFFF"/>
                 </a:solidFill>
@@ -2884,7 +3028,7 @@
               </a:defRPr>
             </a:pPr>
             <a:r>
-              <a:rPr sz="1700" b="1" i="0">
+              <a:rPr sz="1500" b="1" i="0">
                 <a:solidFill>
                   <a:srgbClr val="FFFFFF"/>
                 </a:solidFill>
@@ -2902,7 +3046,7 @@
           <p:cNvPr id="37" name="evidence-title-1">
             <a:extLst xmlns:a="http://schemas.openxmlformats.org/drawingml/2006/main">
               <a:ext uri="{FF2B5EF4-FFF2-40B4-BE49-F238E27FC236}">
-                <a16:creationId xmlns:a16="http://schemas.microsoft.com/office/drawing/2014/main" id="{06F6F570-0CD7-437D-ADF7-EC3C6F27BF68}"/>
+                <a16:creationId xmlns:a16="http://schemas.microsoft.com/office/drawing/2014/main" id="{248E1156-941B-4486-834C-43C02A9C3316}"/>
               </a:ext>
             </a:extLst>
           </p:cNvPr>
@@ -2926,7 +3070,7 @@
           </a:ln>
         </p:spPr>
         <p:txBody>
-          <a:bodyPr xmlns:a="http://schemas.openxmlformats.org/drawingml/2006/main" lIns="0" tIns="0" rIns="0" bIns="0" anchor="ctr">
+          <a:bodyPr xmlns:a="http://schemas.openxmlformats.org/drawingml/2006/main" wrap="none" lIns="0" tIns="0" rIns="0" bIns="0" anchor="ctr">
             <a:noAutofit/>
           </a:bodyPr>
           <a:lstStyle xmlns:a="http://schemas.openxmlformats.org/drawingml/2006/main"/>
@@ -2936,7 +3080,7 @@
                 <a:spcPct val="115000"/>
               </a:lnSpc>
               <a:buNone/>
-              <a:defRPr sz="1800" b="1" i="0">
+              <a:defRPr sz="1700" b="1" i="0">
                 <a:solidFill>
                   <a:srgbClr val="244B7F"/>
                 </a:solidFill>
@@ -2946,7 +3090,7 @@
               </a:defRPr>
             </a:pPr>
             <a:r>
-              <a:rPr sz="1800" b="1" i="0">
+              <a:rPr sz="1700" b="1" i="0">
                 <a:solidFill>
                   <a:srgbClr val="244B7F"/>
                 </a:solidFill>
@@ -2964,7 +3108,7 @@
           <p:cNvPr id="38" name="evidence-body-1">
             <a:extLst xmlns:a="http://schemas.openxmlformats.org/drawingml/2006/main">
               <a:ext uri="{FF2B5EF4-FFF2-40B4-BE49-F238E27FC236}">
-                <a16:creationId xmlns:a16="http://schemas.microsoft.com/office/drawing/2014/main" id="{14F1B868-7509-4E1D-8326-D06935147A24}"/>
+                <a16:creationId xmlns:a16="http://schemas.microsoft.com/office/drawing/2014/main" id="{A6E2E4F0-BED0-4658-8BD0-4A137CE2F408}"/>
               </a:ext>
             </a:extLst>
           </p:cNvPr>
@@ -2988,7 +3132,7 @@
           </a:ln>
         </p:spPr>
         <p:txBody>
-          <a:bodyPr xmlns:a="http://schemas.openxmlformats.org/drawingml/2006/main" lIns="0" tIns="0" rIns="0" bIns="0" anchor="t">
+          <a:bodyPr xmlns:a="http://schemas.openxmlformats.org/drawingml/2006/main" wrap="none" lIns="0" tIns="0" rIns="0" bIns="0" anchor="t">
             <a:noAutofit/>
           </a:bodyPr>
           <a:lstStyle xmlns:a="http://schemas.openxmlformats.org/drawingml/2006/main"/>
@@ -2998,7 +3142,7 @@
                 <a:spcPct val="128000"/>
               </a:lnSpc>
               <a:buNone/>
-              <a:defRPr sz="1700" b="0" i="0">
+              <a:defRPr sz="1500" b="0" i="0">
                 <a:solidFill>
                   <a:srgbClr val="53667D"/>
                 </a:solidFill>
@@ -3008,7 +3152,7 @@
               </a:defRPr>
             </a:pPr>
             <a:r>
-              <a:rPr sz="1700" b="0" i="0">
+              <a:rPr sz="1500" b="0" i="0">
                 <a:solidFill>
                   <a:srgbClr val="53667D"/>
                 </a:solidFill>
@@ -3026,7 +3170,7 @@
           <p:cNvPr id="39" name="evidence-card-2">
             <a:extLst xmlns:a="http://schemas.openxmlformats.org/drawingml/2006/main">
               <a:ext uri="{FF2B5EF4-FFF2-40B4-BE49-F238E27FC236}">
-                <a16:creationId xmlns:a16="http://schemas.microsoft.com/office/drawing/2014/main" id="{2E818538-54E2-4FB3-A972-618C614A106D}"/>
+                <a16:creationId xmlns:a16="http://schemas.microsoft.com/office/drawing/2014/main" id="{DFB8EA87-0A56-4FFD-A10E-2DC0A8963CEC}"/>
               </a:ext>
             </a:extLst>
           </p:cNvPr>
@@ -3075,7 +3219,7 @@
           <p:cNvPr id="40" name="evidence-accent-2">
             <a:extLst xmlns:a="http://schemas.openxmlformats.org/drawingml/2006/main">
               <a:ext uri="{FF2B5EF4-FFF2-40B4-BE49-F238E27FC236}">
-                <a16:creationId xmlns:a16="http://schemas.microsoft.com/office/drawing/2014/main" id="{D79F5101-79B3-4FAE-B7DC-118FB80074F4}"/>
+                <a16:creationId xmlns:a16="http://schemas.microsoft.com/office/drawing/2014/main" id="{C4ADDBD9-29F1-46F6-AC63-CD3AB97876CE}"/>
               </a:ext>
             </a:extLst>
           </p:cNvPr>
@@ -3116,7 +3260,7 @@
           <p:cNvPr id="41" name="evidence-number-2">
             <a:extLst xmlns:a="http://schemas.openxmlformats.org/drawingml/2006/main">
               <a:ext uri="{FF2B5EF4-FFF2-40B4-BE49-F238E27FC236}">
-                <a16:creationId xmlns:a16="http://schemas.microsoft.com/office/drawing/2014/main" id="{E529D4CD-9851-458E-893F-A09E398583C8}"/>
+                <a16:creationId xmlns:a16="http://schemas.microsoft.com/office/drawing/2014/main" id="{C29708B5-DBEA-4AA7-868D-3402E2A20551}"/>
               </a:ext>
             </a:extLst>
           </p:cNvPr>
@@ -3144,17 +3288,17 @@
           </a:ln>
         </p:spPr>
         <p:txBody>
-          <a:bodyPr xmlns:a="http://schemas.openxmlformats.org/drawingml/2006/main" lIns="0" tIns="0" rIns="0" bIns="0" anchor="ctr">
+          <a:bodyPr xmlns:a="http://schemas.openxmlformats.org/drawingml/2006/main" wrap="none" lIns="0" tIns="0" rIns="0" bIns="0" anchor="ctr">
             <a:noAutofit/>
           </a:bodyPr>
           <a:lstStyle xmlns:a="http://schemas.openxmlformats.org/drawingml/2006/main"/>
           <a:p xmlns:a="http://schemas.openxmlformats.org/drawingml/2006/main">
-            <a:pPr algn="l">
+            <a:pPr algn="ctr">
               <a:lnSpc>
                 <a:spcPct val="100000"/>
               </a:lnSpc>
               <a:buNone/>
-              <a:defRPr sz="1700" b="1" i="0">
+              <a:defRPr sz="1500" b="1" i="0">
                 <a:solidFill>
                   <a:srgbClr val="FFFFFF"/>
                 </a:solidFill>
@@ -3164,7 +3308,7 @@
               </a:defRPr>
             </a:pPr>
             <a:r>
-              <a:rPr sz="1700" b="1" i="0">
+              <a:rPr sz="1500" b="1" i="0">
                 <a:solidFill>
                   <a:srgbClr val="FFFFFF"/>
                 </a:solidFill>
@@ -3182,7 +3326,7 @@
           <p:cNvPr id="42" name="evidence-title-2">
             <a:extLst xmlns:a="http://schemas.openxmlformats.org/drawingml/2006/main">
               <a:ext uri="{FF2B5EF4-FFF2-40B4-BE49-F238E27FC236}">
-                <a16:creationId xmlns:a16="http://schemas.microsoft.com/office/drawing/2014/main" id="{594B15F2-CC0F-4BE2-AD06-68D852036A10}"/>
+                <a16:creationId xmlns:a16="http://schemas.microsoft.com/office/drawing/2014/main" id="{60D5AE72-2343-4B4A-B361-C7818DD632EF}"/>
               </a:ext>
             </a:extLst>
           </p:cNvPr>
@@ -3206,7 +3350,7 @@
           </a:ln>
         </p:spPr>
         <p:txBody>
-          <a:bodyPr xmlns:a="http://schemas.openxmlformats.org/drawingml/2006/main" lIns="0" tIns="0" rIns="0" bIns="0" anchor="ctr">
+          <a:bodyPr xmlns:a="http://schemas.openxmlformats.org/drawingml/2006/main" wrap="none" lIns="0" tIns="0" rIns="0" bIns="0" anchor="ctr">
             <a:noAutofit/>
           </a:bodyPr>
           <a:lstStyle xmlns:a="http://schemas.openxmlformats.org/drawingml/2006/main"/>
@@ -3216,7 +3360,7 @@
                 <a:spcPct val="115000"/>
               </a:lnSpc>
               <a:buNone/>
-              <a:defRPr sz="1800" b="1" i="0">
+              <a:defRPr sz="1700" b="1" i="0">
                 <a:solidFill>
                   <a:srgbClr val="244B7F"/>
                 </a:solidFill>
@@ -3226,7 +3370,7 @@
               </a:defRPr>
             </a:pPr>
             <a:r>
-              <a:rPr sz="1800" b="1" i="0">
+              <a:rPr sz="1700" b="1" i="0">
                 <a:solidFill>
                   <a:srgbClr val="244B7F"/>
                 </a:solidFill>
@@ -3244,7 +3388,7 @@
           <p:cNvPr id="43" name="evidence-body-2">
             <a:extLst xmlns:a="http://schemas.openxmlformats.org/drawingml/2006/main">
               <a:ext uri="{FF2B5EF4-FFF2-40B4-BE49-F238E27FC236}">
-                <a16:creationId xmlns:a16="http://schemas.microsoft.com/office/drawing/2014/main" id="{C8669142-293E-47F9-B817-12AD40543B2B}"/>
+                <a16:creationId xmlns:a16="http://schemas.microsoft.com/office/drawing/2014/main" id="{18D412A0-650F-495B-B638-34EC5BDA4D76}"/>
               </a:ext>
             </a:extLst>
           </p:cNvPr>
@@ -3268,7 +3412,7 @@
           </a:ln>
         </p:spPr>
         <p:txBody>
-          <a:bodyPr xmlns:a="http://schemas.openxmlformats.org/drawingml/2006/main" lIns="0" tIns="0" rIns="0" bIns="0" anchor="t">
+          <a:bodyPr xmlns:a="http://schemas.openxmlformats.org/drawingml/2006/main" wrap="none" lIns="0" tIns="0" rIns="0" bIns="0" anchor="t">
             <a:noAutofit/>
           </a:bodyPr>
           <a:lstStyle xmlns:a="http://schemas.openxmlformats.org/drawingml/2006/main"/>
@@ -3278,7 +3422,7 @@
                 <a:spcPct val="128000"/>
               </a:lnSpc>
               <a:buNone/>
-              <a:defRPr sz="1700" b="0" i="0">
+              <a:defRPr sz="1500" b="0" i="0">
                 <a:solidFill>
                   <a:srgbClr val="53667D"/>
                 </a:solidFill>
@@ -3288,7 +3432,7 @@
               </a:defRPr>
             </a:pPr>
             <a:r>
-              <a:rPr sz="1700" b="0" i="0">
+              <a:rPr sz="1500" b="0" i="0">
                 <a:solidFill>
                   <a:srgbClr val="53667D"/>
                 </a:solidFill>
@@ -3306,7 +3450,7 @@
           <p:cNvPr id="44" name="conclusion-card">
             <a:extLst xmlns:a="http://schemas.openxmlformats.org/drawingml/2006/main">
               <a:ext uri="{FF2B5EF4-FFF2-40B4-BE49-F238E27FC236}">
-                <a16:creationId xmlns:a16="http://schemas.microsoft.com/office/drawing/2014/main" id="{00155B4B-1AE1-4FF1-9973-86B111362D5A}"/>
+                <a16:creationId xmlns:a16="http://schemas.microsoft.com/office/drawing/2014/main" id="{559EA7A0-35CF-4764-B0A4-B15AE4ADDEFA}"/>
               </a:ext>
             </a:extLst>
           </p:cNvPr>
@@ -3349,7 +3493,7 @@
         <p:style>
           <a:lnRef xmlns:a="http://schemas.openxmlformats.org/drawingml/2006/main" idx="0"/>
           <a:fillRef xmlns:a="http://schemas.openxmlformats.org/drawingml/2006/main" idx="0"/>
-          <a:effectRef xmlns:a="http://schemas.openxmlformats.org/drawingml/2006/main" idx="13"/>
+          <a:effectRef xmlns:a="http://schemas.openxmlformats.org/drawingml/2006/main" idx="11"/>
           <a:fontRef xmlns:a="http://schemas.openxmlformats.org/drawingml/2006/main" idx="major"/>
         </p:style>
       </p:sp>
@@ -3358,19 +3502,19 @@
           <p:cNvPr id="45" name="conclusion-title">
             <a:extLst xmlns:a="http://schemas.openxmlformats.org/drawingml/2006/main">
               <a:ext uri="{FF2B5EF4-FFF2-40B4-BE49-F238E27FC236}">
-                <a16:creationId xmlns:a16="http://schemas.microsoft.com/office/drawing/2014/main" id="{4E32CB42-7249-455C-BE80-F70D9BA03A86}"/>
-              </a:ext>
-            </a:extLst>
-          </p:cNvPr>
-          <p:cNvSpPr>
-            <a:spLocks xmlns:a="http://schemas.openxmlformats.org/drawingml/2006/main" noGrp="1"/>
-          </p:cNvSpPr>
-          <p:nvPr/>
-        </p:nvSpPr>
-        <p:spPr>
-          <a:xfrm xmlns:a="http://schemas.openxmlformats.org/drawingml/2006/main" rot="0">
-            <a:off x="2800350" y="5410200"/>
-            <a:ext cx="8582025" cy="280835"/>
+                <a16:creationId xmlns:a16="http://schemas.microsoft.com/office/drawing/2014/main" id="{39354D81-7D92-4D18-86F5-5CADB5623F6F}"/>
+              </a:ext>
+            </a:extLst>
+          </p:cNvPr>
+          <p:cNvSpPr>
+            <a:spLocks xmlns:a="http://schemas.openxmlformats.org/drawingml/2006/main" noGrp="1"/>
+          </p:cNvSpPr>
+          <p:nvPr/>
+        </p:nvSpPr>
+        <p:spPr>
+          <a:xfrm xmlns:a="http://schemas.openxmlformats.org/drawingml/2006/main" rot="0">
+            <a:off x="2800350" y="5401713"/>
+            <a:ext cx="8582025" cy="306591"/>
           </a:xfrm>
           <a:prstGeom xmlns:a="http://schemas.openxmlformats.org/drawingml/2006/main" prst="rect">
             <a:avLst/>
@@ -3382,7 +3526,7 @@
           </a:ln>
         </p:spPr>
         <p:txBody>
-          <a:bodyPr xmlns:a="http://schemas.openxmlformats.org/drawingml/2006/main" lIns="0" tIns="0" rIns="0" bIns="0" anchor="ctr">
+          <a:bodyPr xmlns:a="http://schemas.openxmlformats.org/drawingml/2006/main" wrap="square" lIns="0" tIns="0" rIns="0" bIns="0" anchor="ctr">
             <a:noAutofit/>
           </a:bodyPr>
           <a:lstStyle xmlns:a="http://schemas.openxmlformats.org/drawingml/2006/main"/>
@@ -3420,19 +3564,19 @@
           <p:cNvPr id="46" name="conclusion-body">
             <a:extLst xmlns:a="http://schemas.openxmlformats.org/drawingml/2006/main">
               <a:ext uri="{FF2B5EF4-FFF2-40B4-BE49-F238E27FC236}">
-                <a16:creationId xmlns:a16="http://schemas.microsoft.com/office/drawing/2014/main" id="{4F099DE6-10D7-4740-9CD4-7ED977795E1A}"/>
-              </a:ext>
-            </a:extLst>
-          </p:cNvPr>
-          <p:cNvSpPr>
-            <a:spLocks xmlns:a="http://schemas.openxmlformats.org/drawingml/2006/main" noGrp="1"/>
-          </p:cNvSpPr>
-          <p:nvPr/>
-        </p:nvSpPr>
-        <p:spPr>
-          <a:xfrm xmlns:a="http://schemas.openxmlformats.org/drawingml/2006/main" rot="0">
-            <a:off x="2800350" y="5748185"/>
-            <a:ext cx="8582025" cy="233515"/>
+                <a16:creationId xmlns:a16="http://schemas.microsoft.com/office/drawing/2014/main" id="{E9C857EE-EA31-4B9F-A2CF-38298AFD69FD}"/>
+              </a:ext>
+            </a:extLst>
+          </p:cNvPr>
+          <p:cNvSpPr>
+            <a:spLocks xmlns:a="http://schemas.openxmlformats.org/drawingml/2006/main" noGrp="1"/>
+          </p:cNvSpPr>
+          <p:nvPr/>
+        </p:nvSpPr>
+        <p:spPr>
+          <a:xfrm xmlns:a="http://schemas.openxmlformats.org/drawingml/2006/main" rot="0">
+            <a:off x="2800350" y="5765454"/>
+            <a:ext cx="8582025" cy="224733"/>
           </a:xfrm>
           <a:prstGeom xmlns:a="http://schemas.openxmlformats.org/drawingml/2006/main" prst="rect">
             <a:avLst/>
@@ -3444,7 +3588,7 @@
           </a:ln>
         </p:spPr>
         <p:txBody>
-          <a:bodyPr xmlns:a="http://schemas.openxmlformats.org/drawingml/2006/main" lIns="0" tIns="0" rIns="0" bIns="0" anchor="ctr">
+          <a:bodyPr xmlns:a="http://schemas.openxmlformats.org/drawingml/2006/main" wrap="square" lIns="0" tIns="0" rIns="0" bIns="0" anchor="ctr">
             <a:noAutofit/>
           </a:bodyPr>
           <a:lstStyle xmlns:a="http://schemas.openxmlformats.org/drawingml/2006/main"/>
@@ -3454,7 +3598,7 @@
                 <a:spcPct val="118000"/>
               </a:lnSpc>
               <a:buNone/>
-              <a:defRPr sz="1700" b="0" i="0">
+              <a:defRPr sz="1500" b="0" i="0">
                 <a:solidFill>
                   <a:srgbClr val="566B84"/>
                 </a:solidFill>
@@ -3464,7 +3608,7 @@
               </a:defRPr>
             </a:pPr>
             <a:r>
-              <a:rPr sz="1700" b="0" i="0">
+              <a:rPr sz="1500" b="0" i="0">
                 <a:solidFill>
                   <a:srgbClr val="566B84"/>
                 </a:solidFill>
@@ -3482,7 +3626,7 @@
           <p:cNvPr id="47" name="therefore-badge">
             <a:extLst xmlns:a="http://schemas.openxmlformats.org/drawingml/2006/main">
               <a:ext uri="{FF2B5EF4-FFF2-40B4-BE49-F238E27FC236}">
-                <a16:creationId xmlns:a16="http://schemas.microsoft.com/office/drawing/2014/main" id="{60E8B5B1-D862-4CF4-B08D-6FE583FCCEB6}"/>
+                <a16:creationId xmlns:a16="http://schemas.microsoft.com/office/drawing/2014/main" id="{1465776D-4663-4A72-991D-36C2A30BFC92}"/>
               </a:ext>
             </a:extLst>
           </p:cNvPr>
@@ -3512,11 +3656,11 @@
         <p:style>
           <a:lnRef xmlns:a="http://schemas.openxmlformats.org/drawingml/2006/main" idx="0"/>
           <a:fillRef xmlns:a="http://schemas.openxmlformats.org/drawingml/2006/main" idx="0"/>
-          <a:effectRef xmlns:a="http://schemas.openxmlformats.org/drawingml/2006/main" idx="14"/>
+          <a:effectRef xmlns:a="http://schemas.openxmlformats.org/drawingml/2006/main" idx="22"/>
           <a:fontRef xmlns:a="http://schemas.openxmlformats.org/drawingml/2006/main" idx="major"/>
         </p:style>
         <p:txBody>
-          <a:bodyPr xmlns:a="http://schemas.openxmlformats.org/drawingml/2006/main" lIns="0" tIns="0" rIns="0" bIns="0" anchor="ctr">
+          <a:bodyPr xmlns:a="http://schemas.openxmlformats.org/drawingml/2006/main" wrap="none" lIns="0" tIns="0" rIns="0" bIns="0" anchor="ctr">
             <a:noAutofit/>
           </a:bodyPr>
           <a:lstStyle xmlns:a="http://schemas.openxmlformats.org/drawingml/2006/main"/>
@@ -3526,7 +3670,7 @@
                 <a:spcPct val="100000"/>
               </a:lnSpc>
               <a:buNone/>
-              <a:defRPr sz="1800" b="1" i="0">
+              <a:defRPr sz="1700" b="1" i="0">
                 <a:solidFill>
                   <a:srgbClr val="FFFFFF"/>
                 </a:solidFill>
@@ -3536,7 +3680,7 @@
               </a:defRPr>
             </a:pPr>
             <a:r>
-              <a:rPr sz="1800" b="1" i="0">
+              <a:rPr sz="1700" b="1" i="0">
                 <a:solidFill>
                   <a:srgbClr val="FFFFFF"/>
                 </a:solidFill>
@@ -3552,7 +3696,7 @@
     </p:spTree>
     <p:extLst>
       <p:ext uri="{BB962C8B-B14F-4D97-AF65-F5344CB8AC3E}">
-        <p14:creationId xmlns:p14="http://schemas.microsoft.com/office/powerpoint/2010/main" val="355755896"/>
+        <p14:creationId xmlns:p14="http://schemas.microsoft.com/office/powerpoint/2010/main" val="884763921"/>
       </p:ext>
     </p:extLst>
   </p:cSld>
@@ -3762,36 +3906,108 @@
         </a:effectStyle>
         <a:effectStyle>
           <a:effectLst>
+            <a:outerShdw blurRad="266700" dist="114300" dir="5400000">
+              <a:srgbClr val="2F5EA8">
+                <a:alpha val="22000"/>
+              </a:srgbClr>
+            </a:outerShdw>
+          </a:effectLst>
+        </a:effectStyle>
+        <a:effectStyle>
+          <a:effectLst>
+            <a:outerShdw blurRad="152400" dist="66675" dir="5400000">
+              <a:srgbClr val="2F5EA8">
+                <a:alpha val="9000"/>
+              </a:srgbClr>
+            </a:outerShdw>
+          </a:effectLst>
+        </a:effectStyle>
+        <a:effectStyle>
+          <a:effectLst>
+            <a:outerShdw blurRad="152400" dist="66675" dir="5400000">
+              <a:srgbClr val="2F5EA8">
+                <a:alpha val="10000"/>
+              </a:srgbClr>
+            </a:outerShdw>
+          </a:effectLst>
+        </a:effectStyle>
+        <a:effectStyle>
+          <a:effectLst>
+            <a:outerShdw blurRad="171450" dist="76200" dir="5400000">
+              <a:srgbClr val="2F5EA8">
+                <a:alpha val="16000"/>
+              </a:srgbClr>
+            </a:outerShdw>
+          </a:effectLst>
+        </a:effectStyle>
+        <a:effectStyle>
+          <a:effectLst>
+            <a:outerShdw blurRad="114300" dist="47625" dir="5400000">
+              <a:srgbClr val="2F5EA8">
+                <a:alpha val="7000"/>
+              </a:srgbClr>
+            </a:outerShdw>
+          </a:effectLst>
+        </a:effectStyle>
+        <a:effectStyle>
+          <a:effectLst>
+            <a:outerShdw blurRad="95250" dist="38100" dir="5400000">
+              <a:srgbClr val="2F5EA8">
+                <a:alpha val="8000"/>
+              </a:srgbClr>
+            </a:outerShdw>
+          </a:effectLst>
+        </a:effectStyle>
+        <a:effectStyle>
+          <a:effectLst>
+            <a:outerShdw blurRad="209550" dist="95250" dir="5400000">
+              <a:srgbClr val="2F5EA8">
+                <a:alpha val="8000"/>
+              </a:srgbClr>
+            </a:outerShdw>
+          </a:effectLst>
+        </a:effectStyle>
+        <a:effectStyle>
+          <a:effectLst>
+            <a:outerShdw blurRad="133350" dist="57150" dir="5400000">
+              <a:srgbClr val="2F5EA8">
+                <a:alpha val="18000"/>
+              </a:srgbClr>
+            </a:outerShdw>
+          </a:effectLst>
+        </a:effectStyle>
+        <a:effectStyle>
+          <a:effectLst>
+            <a:outerShdw blurRad="200025" dist="85725" dir="5400000">
+              <a:srgbClr val="2F5EA8">
+                <a:alpha val="14000"/>
+              </a:srgbClr>
+            </a:outerShdw>
+          </a:effectLst>
+        </a:effectStyle>
+        <a:effectStyle>
+          <a:effectLst>
+            <a:outerShdw blurRad="171450" dist="76200" dir="5400000">
+              <a:srgbClr val="264E80">
+                <a:alpha val="10000"/>
+              </a:srgbClr>
+            </a:outerShdw>
+          </a:effectLst>
+        </a:effectStyle>
+        <a:effectStyle>
+          <a:effectLst>
+            <a:outerShdw blurRad="171450" dist="76200" dir="5400000">
+              <a:srgbClr val="1F497E">
+                <a:alpha val="8000"/>
+              </a:srgbClr>
+            </a:outerShdw>
+          </a:effectLst>
+        </a:effectStyle>
+        <a:effectStyle>
+          <a:effectLst>
             <a:outerShdw blurRad="95250" dist="38100" dir="5400000">
               <a:srgbClr val="2F5EA8">
                 <a:alpha val="16000"/>
-              </a:srgbClr>
-            </a:outerShdw>
-          </a:effectLst>
-        </a:effectStyle>
-        <a:effectStyle>
-          <a:effectLst>
-            <a:outerShdw blurRad="171450" dist="76200" dir="5400000">
-              <a:srgbClr val="2F5EA8">
-                <a:alpha val="16000"/>
-              </a:srgbClr>
-            </a:outerShdw>
-          </a:effectLst>
-        </a:effectStyle>
-        <a:effectStyle>
-          <a:effectLst>
-            <a:outerShdw blurRad="152400" dist="66675" dir="5400000">
-              <a:srgbClr val="2F5EA8">
-                <a:alpha val="10000"/>
-              </a:srgbClr>
-            </a:outerShdw>
-          </a:effectLst>
-        </a:effectStyle>
-        <a:effectStyle>
-          <a:effectLst>
-            <a:outerShdw blurRad="152400" dist="66675" dir="5400000">
-              <a:srgbClr val="2F5EA8">
-                <a:alpha val="9000"/>
               </a:srgbClr>
             </a:outerShdw>
           </a:effectLst>
